--- a/tools/FreeP.RenderCompare/corpus/06-charts.pptx
+++ b/tools/FreeP.RenderCompare/corpus/06-charts.pptx
@@ -175,7 +175,7 @@
           </c:val>
           <c:extLst>
             <c:ext xmlns:c16="http://schemas.microsoft.com/office/drawing/2014/chart" uri="{C3380CC4-5D6E-409C-BE32-E72D297353CC}">
-              <c16:uniqueId val="{00000003-F4C9-4E4B-AD5E-850984BBD899}"/>
+              <c16:uniqueId val="{00000003-B63B-4C4A-90D5-6CFB00ED50C6}"/>
             </c:ext>
           </c:extLst>
         </c:ser>
@@ -223,7 +223,7 @@
           </c:val>
           <c:extLst>
             <c:ext xmlns:c16="http://schemas.microsoft.com/office/drawing/2014/chart" uri="{C3380CC4-5D6E-409C-BE32-E72D297353CC}">
-              <c16:uniqueId val="{00000004-F4C9-4E4B-AD5E-850984BBD899}"/>
+              <c16:uniqueId val="{00000004-B63B-4C4A-90D5-6CFB00ED50C6}"/>
             </c:ext>
           </c:extLst>
         </c:ser>
@@ -236,11 +236,11 @@
           <c:showBubbleSize val="0"/>
         </c:dLbls>
         <c:gapWidth val="150"/>
-        <c:axId val="1085484495"/>
-        <c:axId val="1085484015"/>
+        <c:axId val="1491475167"/>
+        <c:axId val="1491474687"/>
       </c:barChart>
       <c:catAx>
-        <c:axId val="1085484495"/>
+        <c:axId val="1491475167"/>
         <c:scaling>
           <c:orientation val="minMax"/>
         </c:scaling>
@@ -250,7 +250,7 @@
         <c:majorTickMark val="out"/>
         <c:minorTickMark val="none"/>
         <c:tickLblPos val="nextTo"/>
-        <c:crossAx val="1085484015"/>
+        <c:crossAx val="1491474687"/>
         <c:crosses val="autoZero"/>
         <c:auto val="1"/>
         <c:lblAlgn val="ctr"/>
@@ -258,7 +258,7 @@
         <c:noMultiLvlLbl val="0"/>
       </c:catAx>
       <c:valAx>
-        <c:axId val="1085484015"/>
+        <c:axId val="1491474687"/>
         <c:scaling>
           <c:orientation val="minMax"/>
         </c:scaling>
@@ -269,7 +269,7 @@
         <c:majorTickMark val="out"/>
         <c:minorTickMark val="none"/>
         <c:tickLblPos val="nextTo"/>
-        <c:crossAx val="1085484495"/>
+        <c:crossAx val="1491475167"/>
         <c:crosses val="autoZero"/>
         <c:crossBetween val="between"/>
       </c:valAx>
@@ -370,7 +370,7 @@
               </c15:filteredCategoryTitle>
             </c:ext>
             <c:ext xmlns:c16="http://schemas.microsoft.com/office/drawing/2014/chart" uri="{C3380CC4-5D6E-409C-BE32-E72D297353CC}">
-              <c16:uniqueId val="{00000003-040F-4A30-89A5-2B335997B14E}"/>
+              <c16:uniqueId val="{00000003-0872-4BD8-A820-5C61F94EB65E}"/>
             </c:ext>
           </c:extLst>
           <c:cat>
@@ -436,7 +436,7 @@
               </c15:filteredCategoryTitle>
             </c:ext>
             <c:ext xmlns:c16="http://schemas.microsoft.com/office/drawing/2014/chart" uri="{C3380CC4-5D6E-409C-BE32-E72D297353CC}">
-              <c16:uniqueId val="{00000004-040F-4A30-89A5-2B335997B14E}"/>
+              <c16:uniqueId val="{00000004-0872-4BD8-A820-5C61F94EB65E}"/>
             </c:ext>
           </c:extLst>
           <c:cat>
@@ -467,11 +467,11 @@
         </c:dLbls>
         <c:marker val="1"/>
         <c:smooth val="0"/>
-        <c:axId val="1190406335"/>
-        <c:axId val="1190405375"/>
+        <c:axId val="1501808511"/>
+        <c:axId val="1501808991"/>
       </c:lineChart>
       <c:catAx>
-        <c:axId val="1190406335"/>
+        <c:axId val="1501808511"/>
         <c:scaling>
           <c:orientation val="minMax"/>
         </c:scaling>
@@ -481,7 +481,7 @@
         <c:majorTickMark val="out"/>
         <c:minorTickMark val="none"/>
         <c:tickLblPos val="nextTo"/>
-        <c:crossAx val="1190405375"/>
+        <c:crossAx val="1501808991"/>
         <c:crosses val="autoZero"/>
         <c:auto val="1"/>
         <c:lblAlgn val="ctr"/>
@@ -489,7 +489,7 @@
         <c:noMultiLvlLbl val="0"/>
       </c:catAx>
       <c:valAx>
-        <c:axId val="1190405375"/>
+        <c:axId val="1501808991"/>
         <c:scaling>
           <c:orientation val="minMax"/>
         </c:scaling>
@@ -500,7 +500,7 @@
         <c:majorTickMark val="out"/>
         <c:minorTickMark val="none"/>
         <c:tickLblPos val="nextTo"/>
-        <c:crossAx val="1190406335"/>
+        <c:crossAx val="1501808511"/>
         <c:crosses val="autoZero"/>
         <c:crossBetween val="between"/>
       </c:valAx>
@@ -599,7 +599,7 @@
               </c15:filteredCategoryTitle>
             </c:ext>
             <c:ext xmlns:c16="http://schemas.microsoft.com/office/drawing/2014/chart" uri="{C3380CC4-5D6E-409C-BE32-E72D297353CC}">
-              <c16:uniqueId val="{00000001-E9E2-4A28-94D9-0D61B6304324}"/>
+              <c16:uniqueId val="{00000001-188D-406B-A45D-A093834E5E14}"/>
             </c:ext>
           </c:extLst>
           <c:cat>
@@ -735,7 +735,7 @@
               </c15:filteredCategoryTitle>
             </c:ext>
             <c:ext xmlns:c16="http://schemas.microsoft.com/office/drawing/2014/chart" uri="{C3380CC4-5D6E-409C-BE32-E72D297353CC}">
-              <c16:uniqueId val="{00000003-9219-4076-8711-BADC76017A1A}"/>
+              <c16:uniqueId val="{00000003-5FF6-45C4-99FB-471F78B3DE1C}"/>
             </c:ext>
           </c:extLst>
           <c:cat>
@@ -813,7 +813,7 @@
               </c15:filteredCategoryTitle>
             </c:ext>
             <c:ext xmlns:c16="http://schemas.microsoft.com/office/drawing/2014/chart" uri="{C3380CC4-5D6E-409C-BE32-E72D297353CC}">
-              <c16:uniqueId val="{00000004-9219-4076-8711-BADC76017A1A}"/>
+              <c16:uniqueId val="{00000004-5FF6-45C4-99FB-471F78B3DE1C}"/>
             </c:ext>
           </c:extLst>
           <c:cat>
@@ -849,11 +849,11 @@
           <c:showBubbleSize val="0"/>
         </c:dLbls>
         <c:gapWidth val="150"/>
-        <c:axId val="1190606447"/>
-        <c:axId val="1190607407"/>
+        <c:axId val="1375523295"/>
+        <c:axId val="1375522815"/>
       </c:barChart>
       <c:catAx>
-        <c:axId val="1190606447"/>
+        <c:axId val="1375523295"/>
         <c:scaling>
           <c:orientation val="minMax"/>
         </c:scaling>
@@ -863,7 +863,7 @@
         <c:majorTickMark val="out"/>
         <c:minorTickMark val="none"/>
         <c:tickLblPos val="nextTo"/>
-        <c:crossAx val="1190607407"/>
+        <c:crossAx val="1375522815"/>
         <c:crosses val="autoZero"/>
         <c:auto val="1"/>
         <c:lblAlgn val="ctr"/>
@@ -871,7 +871,7 @@
         <c:noMultiLvlLbl val="0"/>
       </c:catAx>
       <c:valAx>
-        <c:axId val="1190607407"/>
+        <c:axId val="1375522815"/>
         <c:scaling>
           <c:orientation val="minMax"/>
         </c:scaling>
@@ -882,7 +882,7 @@
         <c:majorTickMark val="out"/>
         <c:minorTickMark val="none"/>
         <c:tickLblPos val="nextTo"/>
-        <c:crossAx val="1190606447"/>
+        <c:crossAx val="1375523295"/>
         <c:crosses val="autoZero"/>
         <c:crossBetween val="between"/>
       </c:valAx>
@@ -940,7 +940,7 @@
           <p:cNvPr id="2" name="Title 1">
             <a:extLst>
               <a:ext uri="{FF2B5EF4-FFF2-40B4-BE49-F238E27FC236}">
-                <a16:creationId xmlns:a16="http://schemas.microsoft.com/office/drawing/2014/main" id="{374FE2C8-3D54-EA61-C530-821AC0CDA37B}"/>
+                <a16:creationId xmlns:a16="http://schemas.microsoft.com/office/drawing/2014/main" id="{C657CBCA-5EE1-34D9-52E0-F08F92F7A616}"/>
               </a:ext>
             </a:extLst>
           </p:cNvPr>
@@ -977,7 +977,7 @@
           <p:cNvPr id="3" name="Subtitle 2">
             <a:extLst>
               <a:ext uri="{FF2B5EF4-FFF2-40B4-BE49-F238E27FC236}">
-                <a16:creationId xmlns:a16="http://schemas.microsoft.com/office/drawing/2014/main" id="{41E84909-A619-26B0-25F2-A13D695C647A}"/>
+                <a16:creationId xmlns:a16="http://schemas.microsoft.com/office/drawing/2014/main" id="{D174FC73-3C29-87A7-FD3F-69E99CAE83A9}"/>
               </a:ext>
             </a:extLst>
           </p:cNvPr>
@@ -1047,7 +1047,7 @@
           <p:cNvPr id="4" name="Date Placeholder 3">
             <a:extLst>
               <a:ext uri="{FF2B5EF4-FFF2-40B4-BE49-F238E27FC236}">
-                <a16:creationId xmlns:a16="http://schemas.microsoft.com/office/drawing/2014/main" id="{E39084D4-40D7-F7CF-3957-82373E949E18}"/>
+                <a16:creationId xmlns:a16="http://schemas.microsoft.com/office/drawing/2014/main" id="{A02586D8-1888-010F-DE9F-E2E341645727}"/>
               </a:ext>
             </a:extLst>
           </p:cNvPr>
@@ -1063,9 +1063,9 @@
           <a:bodyPr/>
           <a:lstStyle/>
           <a:p>
-            <a:fld id="{D4B82164-15D3-4208-9C09-8289ADF02C1C}" type="datetimeFigureOut">
+            <a:fld id="{1E0E0194-E47C-45D2-BCFC-19F6E94C0411}" type="datetimeFigureOut">
               <a:rPr lang="en-US" smtClean="0"/>
-              <a:t>6/25/2026</a:t>
+              <a:t>6/26/2026</a:t>
             </a:fld>
             <a:endParaRPr lang="en-US"/>
           </a:p>
@@ -1076,7 +1076,7 @@
           <p:cNvPr id="5" name="Footer Placeholder 4">
             <a:extLst>
               <a:ext uri="{FF2B5EF4-FFF2-40B4-BE49-F238E27FC236}">
-                <a16:creationId xmlns:a16="http://schemas.microsoft.com/office/drawing/2014/main" id="{6E17B96C-2A73-85CB-0829-E50EF5816331}"/>
+                <a16:creationId xmlns:a16="http://schemas.microsoft.com/office/drawing/2014/main" id="{0BB330EE-472D-75C2-54B5-2FB075D8840F}"/>
               </a:ext>
             </a:extLst>
           </p:cNvPr>
@@ -1101,7 +1101,7 @@
           <p:cNvPr id="6" name="Slide Number Placeholder 5">
             <a:extLst>
               <a:ext uri="{FF2B5EF4-FFF2-40B4-BE49-F238E27FC236}">
-                <a16:creationId xmlns:a16="http://schemas.microsoft.com/office/drawing/2014/main" id="{A7FABC25-67A6-1D3F-0C02-893C28EAC31F}"/>
+                <a16:creationId xmlns:a16="http://schemas.microsoft.com/office/drawing/2014/main" id="{FFBD9C93-DF79-9B10-8ECD-8E1BE5A15399}"/>
               </a:ext>
             </a:extLst>
           </p:cNvPr>
@@ -1117,7 +1117,7 @@
           <a:bodyPr/>
           <a:lstStyle/>
           <a:p>
-            <a:fld id="{11943C22-FA77-4F5D-9362-24F8D4FE4676}" type="slidenum">
+            <a:fld id="{2C5FFCCB-F03B-45DB-8D0E-85A43D36A667}" type="slidenum">
               <a:rPr lang="en-US" smtClean="0"/>
               <a:t>‹#›</a:t>
             </a:fld>
@@ -1128,7 +1128,7 @@
     </p:spTree>
     <p:extLst>
       <p:ext uri="{BB962C8B-B14F-4D97-AF65-F5344CB8AC3E}">
-        <p14:creationId xmlns:p14="http://schemas.microsoft.com/office/powerpoint/2010/main" val="3712919684"/>
+        <p14:creationId xmlns:p14="http://schemas.microsoft.com/office/powerpoint/2010/main" val="846053586"/>
       </p:ext>
     </p:extLst>
   </p:cSld>
@@ -1160,7 +1160,7 @@
           <p:cNvPr id="2" name="Title 1">
             <a:extLst>
               <a:ext uri="{FF2B5EF4-FFF2-40B4-BE49-F238E27FC236}">
-                <a16:creationId xmlns:a16="http://schemas.microsoft.com/office/drawing/2014/main" id="{3498A866-0361-66A0-720E-BD71CB95B35F}"/>
+                <a16:creationId xmlns:a16="http://schemas.microsoft.com/office/drawing/2014/main" id="{F091E3C1-7001-E48B-1F9A-D1A3974ACC92}"/>
               </a:ext>
             </a:extLst>
           </p:cNvPr>
@@ -1188,7 +1188,7 @@
           <p:cNvPr id="3" name="Vertical Text Placeholder 2">
             <a:extLst>
               <a:ext uri="{FF2B5EF4-FFF2-40B4-BE49-F238E27FC236}">
-                <a16:creationId xmlns:a16="http://schemas.microsoft.com/office/drawing/2014/main" id="{C714E0B3-24C1-08ED-C7CE-30B00A876943}"/>
+                <a16:creationId xmlns:a16="http://schemas.microsoft.com/office/drawing/2014/main" id="{0A3048AF-A90A-D3A0-0514-6C1F0B1B0D71}"/>
               </a:ext>
             </a:extLst>
           </p:cNvPr>
@@ -1245,7 +1245,7 @@
           <p:cNvPr id="4" name="Date Placeholder 3">
             <a:extLst>
               <a:ext uri="{FF2B5EF4-FFF2-40B4-BE49-F238E27FC236}">
-                <a16:creationId xmlns:a16="http://schemas.microsoft.com/office/drawing/2014/main" id="{6EE1EA23-AF3F-561D-D650-CD3DCE05C9C5}"/>
+                <a16:creationId xmlns:a16="http://schemas.microsoft.com/office/drawing/2014/main" id="{EDA9D70B-3604-E277-3F58-5A18E0FD56B3}"/>
               </a:ext>
             </a:extLst>
           </p:cNvPr>
@@ -1261,9 +1261,9 @@
           <a:bodyPr/>
           <a:lstStyle/>
           <a:p>
-            <a:fld id="{D4B82164-15D3-4208-9C09-8289ADF02C1C}" type="datetimeFigureOut">
+            <a:fld id="{1E0E0194-E47C-45D2-BCFC-19F6E94C0411}" type="datetimeFigureOut">
               <a:rPr lang="en-US" smtClean="0"/>
-              <a:t>6/25/2026</a:t>
+              <a:t>6/26/2026</a:t>
             </a:fld>
             <a:endParaRPr lang="en-US"/>
           </a:p>
@@ -1274,7 +1274,7 @@
           <p:cNvPr id="5" name="Footer Placeholder 4">
             <a:extLst>
               <a:ext uri="{FF2B5EF4-FFF2-40B4-BE49-F238E27FC236}">
-                <a16:creationId xmlns:a16="http://schemas.microsoft.com/office/drawing/2014/main" id="{0D2A22C8-849D-3E4F-0DF0-15508FF70ED1}"/>
+                <a16:creationId xmlns:a16="http://schemas.microsoft.com/office/drawing/2014/main" id="{419BD22C-23D3-826B-A81A-1E46C68ACE69}"/>
               </a:ext>
             </a:extLst>
           </p:cNvPr>
@@ -1299,7 +1299,7 @@
           <p:cNvPr id="6" name="Slide Number Placeholder 5">
             <a:extLst>
               <a:ext uri="{FF2B5EF4-FFF2-40B4-BE49-F238E27FC236}">
-                <a16:creationId xmlns:a16="http://schemas.microsoft.com/office/drawing/2014/main" id="{5329F851-EEF5-8449-7A4D-E28748C0C19C}"/>
+                <a16:creationId xmlns:a16="http://schemas.microsoft.com/office/drawing/2014/main" id="{96AE3AE2-8A84-5F55-52F3-82E86E84F6A8}"/>
               </a:ext>
             </a:extLst>
           </p:cNvPr>
@@ -1315,7 +1315,7 @@
           <a:bodyPr/>
           <a:lstStyle/>
           <a:p>
-            <a:fld id="{11943C22-FA77-4F5D-9362-24F8D4FE4676}" type="slidenum">
+            <a:fld id="{2C5FFCCB-F03B-45DB-8D0E-85A43D36A667}" type="slidenum">
               <a:rPr lang="en-US" smtClean="0"/>
               <a:t>‹#›</a:t>
             </a:fld>
@@ -1326,7 +1326,7 @@
     </p:spTree>
     <p:extLst>
       <p:ext uri="{BB962C8B-B14F-4D97-AF65-F5344CB8AC3E}">
-        <p14:creationId xmlns:p14="http://schemas.microsoft.com/office/powerpoint/2010/main" val="2385907086"/>
+        <p14:creationId xmlns:p14="http://schemas.microsoft.com/office/powerpoint/2010/main" val="1875226089"/>
       </p:ext>
     </p:extLst>
   </p:cSld>
@@ -1358,7 +1358,7 @@
           <p:cNvPr id="2" name="Vertical Title 1">
             <a:extLst>
               <a:ext uri="{FF2B5EF4-FFF2-40B4-BE49-F238E27FC236}">
-                <a16:creationId xmlns:a16="http://schemas.microsoft.com/office/drawing/2014/main" id="{7228EEDD-CD93-EE3D-3F37-9A444F69DCE3}"/>
+                <a16:creationId xmlns:a16="http://schemas.microsoft.com/office/drawing/2014/main" id="{500E171F-BF6A-5AA8-AAFD-6E275E148C13}"/>
               </a:ext>
             </a:extLst>
           </p:cNvPr>
@@ -1391,7 +1391,7 @@
           <p:cNvPr id="3" name="Vertical Text Placeholder 2">
             <a:extLst>
               <a:ext uri="{FF2B5EF4-FFF2-40B4-BE49-F238E27FC236}">
-                <a16:creationId xmlns:a16="http://schemas.microsoft.com/office/drawing/2014/main" id="{67CEA34F-55DF-6BFC-0522-457F9B3858EC}"/>
+                <a16:creationId xmlns:a16="http://schemas.microsoft.com/office/drawing/2014/main" id="{C58EE810-644A-C524-7FC2-4ABA0E1335BB}"/>
               </a:ext>
             </a:extLst>
           </p:cNvPr>
@@ -1453,7 +1453,7 @@
           <p:cNvPr id="4" name="Date Placeholder 3">
             <a:extLst>
               <a:ext uri="{FF2B5EF4-FFF2-40B4-BE49-F238E27FC236}">
-                <a16:creationId xmlns:a16="http://schemas.microsoft.com/office/drawing/2014/main" id="{790B194F-825B-9FDF-7C2D-17F563E77A62}"/>
+                <a16:creationId xmlns:a16="http://schemas.microsoft.com/office/drawing/2014/main" id="{AD65E375-B37A-6790-7979-32727BDA106D}"/>
               </a:ext>
             </a:extLst>
           </p:cNvPr>
@@ -1469,9 +1469,9 @@
           <a:bodyPr/>
           <a:lstStyle/>
           <a:p>
-            <a:fld id="{D4B82164-15D3-4208-9C09-8289ADF02C1C}" type="datetimeFigureOut">
+            <a:fld id="{1E0E0194-E47C-45D2-BCFC-19F6E94C0411}" type="datetimeFigureOut">
               <a:rPr lang="en-US" smtClean="0"/>
-              <a:t>6/25/2026</a:t>
+              <a:t>6/26/2026</a:t>
             </a:fld>
             <a:endParaRPr lang="en-US"/>
           </a:p>
@@ -1482,7 +1482,7 @@
           <p:cNvPr id="5" name="Footer Placeholder 4">
             <a:extLst>
               <a:ext uri="{FF2B5EF4-FFF2-40B4-BE49-F238E27FC236}">
-                <a16:creationId xmlns:a16="http://schemas.microsoft.com/office/drawing/2014/main" id="{D35B80E8-74B2-C84C-159D-81A53AFAC307}"/>
+                <a16:creationId xmlns:a16="http://schemas.microsoft.com/office/drawing/2014/main" id="{61E16E22-212B-2168-CB14-94EAAEC76BBA}"/>
               </a:ext>
             </a:extLst>
           </p:cNvPr>
@@ -1507,7 +1507,7 @@
           <p:cNvPr id="6" name="Slide Number Placeholder 5">
             <a:extLst>
               <a:ext uri="{FF2B5EF4-FFF2-40B4-BE49-F238E27FC236}">
-                <a16:creationId xmlns:a16="http://schemas.microsoft.com/office/drawing/2014/main" id="{4BD40B98-F69F-C894-2B58-71C88A23E57F}"/>
+                <a16:creationId xmlns:a16="http://schemas.microsoft.com/office/drawing/2014/main" id="{1612C41A-7512-5C3E-57ED-BD0B25DB1B82}"/>
               </a:ext>
             </a:extLst>
           </p:cNvPr>
@@ -1523,7 +1523,7 @@
           <a:bodyPr/>
           <a:lstStyle/>
           <a:p>
-            <a:fld id="{11943C22-FA77-4F5D-9362-24F8D4FE4676}" type="slidenum">
+            <a:fld id="{2C5FFCCB-F03B-45DB-8D0E-85A43D36A667}" type="slidenum">
               <a:rPr lang="en-US" smtClean="0"/>
               <a:t>‹#›</a:t>
             </a:fld>
@@ -1534,7 +1534,7 @@
     </p:spTree>
     <p:extLst>
       <p:ext uri="{BB962C8B-B14F-4D97-AF65-F5344CB8AC3E}">
-        <p14:creationId xmlns:p14="http://schemas.microsoft.com/office/powerpoint/2010/main" val="930051425"/>
+        <p14:creationId xmlns:p14="http://schemas.microsoft.com/office/powerpoint/2010/main" val="2261245618"/>
       </p:ext>
     </p:extLst>
   </p:cSld>
@@ -1566,7 +1566,7 @@
           <p:cNvPr id="2" name="Title 1">
             <a:extLst>
               <a:ext uri="{FF2B5EF4-FFF2-40B4-BE49-F238E27FC236}">
-                <a16:creationId xmlns:a16="http://schemas.microsoft.com/office/drawing/2014/main" id="{39F6CEA7-830D-E2AA-10B8-DD73F4F1739B}"/>
+                <a16:creationId xmlns:a16="http://schemas.microsoft.com/office/drawing/2014/main" id="{E97DADF1-7024-0348-159B-A88344474A1A}"/>
               </a:ext>
             </a:extLst>
           </p:cNvPr>
@@ -1594,7 +1594,7 @@
           <p:cNvPr id="3" name="Content Placeholder 2">
             <a:extLst>
               <a:ext uri="{FF2B5EF4-FFF2-40B4-BE49-F238E27FC236}">
-                <a16:creationId xmlns:a16="http://schemas.microsoft.com/office/drawing/2014/main" id="{B63F323F-84E4-3499-A0A5-EA811421EDE4}"/>
+                <a16:creationId xmlns:a16="http://schemas.microsoft.com/office/drawing/2014/main" id="{A96DA2A9-4FD8-EEA8-C39E-203D157C8A94}"/>
               </a:ext>
             </a:extLst>
           </p:cNvPr>
@@ -1651,7 +1651,7 @@
           <p:cNvPr id="4" name="Date Placeholder 3">
             <a:extLst>
               <a:ext uri="{FF2B5EF4-FFF2-40B4-BE49-F238E27FC236}">
-                <a16:creationId xmlns:a16="http://schemas.microsoft.com/office/drawing/2014/main" id="{7DCF4B69-735A-103F-A490-4E2FE96D132C}"/>
+                <a16:creationId xmlns:a16="http://schemas.microsoft.com/office/drawing/2014/main" id="{00834657-308D-3AD4-5969-68E9C13EB4D1}"/>
               </a:ext>
             </a:extLst>
           </p:cNvPr>
@@ -1667,9 +1667,9 @@
           <a:bodyPr/>
           <a:lstStyle/>
           <a:p>
-            <a:fld id="{D4B82164-15D3-4208-9C09-8289ADF02C1C}" type="datetimeFigureOut">
+            <a:fld id="{1E0E0194-E47C-45D2-BCFC-19F6E94C0411}" type="datetimeFigureOut">
               <a:rPr lang="en-US" smtClean="0"/>
-              <a:t>6/25/2026</a:t>
+              <a:t>6/26/2026</a:t>
             </a:fld>
             <a:endParaRPr lang="en-US"/>
           </a:p>
@@ -1680,7 +1680,7 @@
           <p:cNvPr id="5" name="Footer Placeholder 4">
             <a:extLst>
               <a:ext uri="{FF2B5EF4-FFF2-40B4-BE49-F238E27FC236}">
-                <a16:creationId xmlns:a16="http://schemas.microsoft.com/office/drawing/2014/main" id="{95F74EF5-C499-0EA9-2716-6B71A9310F52}"/>
+                <a16:creationId xmlns:a16="http://schemas.microsoft.com/office/drawing/2014/main" id="{B3D0EAE9-89C3-E2DF-5CF3-E752448C80EE}"/>
               </a:ext>
             </a:extLst>
           </p:cNvPr>
@@ -1705,7 +1705,7 @@
           <p:cNvPr id="6" name="Slide Number Placeholder 5">
             <a:extLst>
               <a:ext uri="{FF2B5EF4-FFF2-40B4-BE49-F238E27FC236}">
-                <a16:creationId xmlns:a16="http://schemas.microsoft.com/office/drawing/2014/main" id="{3BF1216C-A648-6B4F-F24F-D236E71F9C67}"/>
+                <a16:creationId xmlns:a16="http://schemas.microsoft.com/office/drawing/2014/main" id="{0A03D184-E6B5-D935-2C04-A2B273FCB6DB}"/>
               </a:ext>
             </a:extLst>
           </p:cNvPr>
@@ -1721,7 +1721,7 @@
           <a:bodyPr/>
           <a:lstStyle/>
           <a:p>
-            <a:fld id="{11943C22-FA77-4F5D-9362-24F8D4FE4676}" type="slidenum">
+            <a:fld id="{2C5FFCCB-F03B-45DB-8D0E-85A43D36A667}" type="slidenum">
               <a:rPr lang="en-US" smtClean="0"/>
               <a:t>‹#›</a:t>
             </a:fld>
@@ -1732,7 +1732,7 @@
     </p:spTree>
     <p:extLst>
       <p:ext uri="{BB962C8B-B14F-4D97-AF65-F5344CB8AC3E}">
-        <p14:creationId xmlns:p14="http://schemas.microsoft.com/office/powerpoint/2010/main" val="522626004"/>
+        <p14:creationId xmlns:p14="http://schemas.microsoft.com/office/powerpoint/2010/main" val="3375401901"/>
       </p:ext>
     </p:extLst>
   </p:cSld>
@@ -1764,7 +1764,7 @@
           <p:cNvPr id="2" name="Title 1">
             <a:extLst>
               <a:ext uri="{FF2B5EF4-FFF2-40B4-BE49-F238E27FC236}">
-                <a16:creationId xmlns:a16="http://schemas.microsoft.com/office/drawing/2014/main" id="{6D1E271A-2802-E091-F110-F0A351D1FB80}"/>
+                <a16:creationId xmlns:a16="http://schemas.microsoft.com/office/drawing/2014/main" id="{9356BAE7-305C-C136-101B-AC811BA44FA5}"/>
               </a:ext>
             </a:extLst>
           </p:cNvPr>
@@ -1801,7 +1801,7 @@
           <p:cNvPr id="3" name="Text Placeholder 2">
             <a:extLst>
               <a:ext uri="{FF2B5EF4-FFF2-40B4-BE49-F238E27FC236}">
-                <a16:creationId xmlns:a16="http://schemas.microsoft.com/office/drawing/2014/main" id="{7C25457C-6537-F063-CFF8-0CF228DA6A08}"/>
+                <a16:creationId xmlns:a16="http://schemas.microsoft.com/office/drawing/2014/main" id="{32C2569E-B7B5-1AB1-5380-20C7CA2A88A5}"/>
               </a:ext>
             </a:extLst>
           </p:cNvPr>
@@ -1926,7 +1926,7 @@
           <p:cNvPr id="4" name="Date Placeholder 3">
             <a:extLst>
               <a:ext uri="{FF2B5EF4-FFF2-40B4-BE49-F238E27FC236}">
-                <a16:creationId xmlns:a16="http://schemas.microsoft.com/office/drawing/2014/main" id="{D6E75ADA-2D90-A4E5-5CD4-A8AB4EAB1BB7}"/>
+                <a16:creationId xmlns:a16="http://schemas.microsoft.com/office/drawing/2014/main" id="{7FED36E0-8847-A364-966A-701C49186BAE}"/>
               </a:ext>
             </a:extLst>
           </p:cNvPr>
@@ -1942,9 +1942,9 @@
           <a:bodyPr/>
           <a:lstStyle/>
           <a:p>
-            <a:fld id="{D4B82164-15D3-4208-9C09-8289ADF02C1C}" type="datetimeFigureOut">
+            <a:fld id="{1E0E0194-E47C-45D2-BCFC-19F6E94C0411}" type="datetimeFigureOut">
               <a:rPr lang="en-US" smtClean="0"/>
-              <a:t>6/25/2026</a:t>
+              <a:t>6/26/2026</a:t>
             </a:fld>
             <a:endParaRPr lang="en-US"/>
           </a:p>
@@ -1955,7 +1955,7 @@
           <p:cNvPr id="5" name="Footer Placeholder 4">
             <a:extLst>
               <a:ext uri="{FF2B5EF4-FFF2-40B4-BE49-F238E27FC236}">
-                <a16:creationId xmlns:a16="http://schemas.microsoft.com/office/drawing/2014/main" id="{3F7AA6DD-4852-CBA5-AF6A-60B9F55BC8ED}"/>
+                <a16:creationId xmlns:a16="http://schemas.microsoft.com/office/drawing/2014/main" id="{D8B425BB-629A-1C56-1FF9-53A892672BF7}"/>
               </a:ext>
             </a:extLst>
           </p:cNvPr>
@@ -1980,7 +1980,7 @@
           <p:cNvPr id="6" name="Slide Number Placeholder 5">
             <a:extLst>
               <a:ext uri="{FF2B5EF4-FFF2-40B4-BE49-F238E27FC236}">
-                <a16:creationId xmlns:a16="http://schemas.microsoft.com/office/drawing/2014/main" id="{CBB33C54-3B91-2023-A7D8-36469A900517}"/>
+                <a16:creationId xmlns:a16="http://schemas.microsoft.com/office/drawing/2014/main" id="{AF22B547-51B6-F377-E0FD-AE5AADD9749A}"/>
               </a:ext>
             </a:extLst>
           </p:cNvPr>
@@ -1996,7 +1996,7 @@
           <a:bodyPr/>
           <a:lstStyle/>
           <a:p>
-            <a:fld id="{11943C22-FA77-4F5D-9362-24F8D4FE4676}" type="slidenum">
+            <a:fld id="{2C5FFCCB-F03B-45DB-8D0E-85A43D36A667}" type="slidenum">
               <a:rPr lang="en-US" smtClean="0"/>
               <a:t>‹#›</a:t>
             </a:fld>
@@ -2007,7 +2007,7 @@
     </p:spTree>
     <p:extLst>
       <p:ext uri="{BB962C8B-B14F-4D97-AF65-F5344CB8AC3E}">
-        <p14:creationId xmlns:p14="http://schemas.microsoft.com/office/powerpoint/2010/main" val="1135744052"/>
+        <p14:creationId xmlns:p14="http://schemas.microsoft.com/office/powerpoint/2010/main" val="2188440364"/>
       </p:ext>
     </p:extLst>
   </p:cSld>
@@ -2039,7 +2039,7 @@
           <p:cNvPr id="2" name="Title 1">
             <a:extLst>
               <a:ext uri="{FF2B5EF4-FFF2-40B4-BE49-F238E27FC236}">
-                <a16:creationId xmlns:a16="http://schemas.microsoft.com/office/drawing/2014/main" id="{E5A596A4-3DB1-6084-C8D3-429A6A3EA2FE}"/>
+                <a16:creationId xmlns:a16="http://schemas.microsoft.com/office/drawing/2014/main" id="{A08B936A-6065-FDBD-7F27-C7286D7C6842}"/>
               </a:ext>
             </a:extLst>
           </p:cNvPr>
@@ -2067,7 +2067,7 @@
           <p:cNvPr id="3" name="Content Placeholder 2">
             <a:extLst>
               <a:ext uri="{FF2B5EF4-FFF2-40B4-BE49-F238E27FC236}">
-                <a16:creationId xmlns:a16="http://schemas.microsoft.com/office/drawing/2014/main" id="{52B7AD73-F84F-E823-AE06-5E1AF9DA1D72}"/>
+                <a16:creationId xmlns:a16="http://schemas.microsoft.com/office/drawing/2014/main" id="{35D4A304-32FC-A106-909F-373ABBDF7296}"/>
               </a:ext>
             </a:extLst>
           </p:cNvPr>
@@ -2129,7 +2129,7 @@
           <p:cNvPr id="4" name="Content Placeholder 3">
             <a:extLst>
               <a:ext uri="{FF2B5EF4-FFF2-40B4-BE49-F238E27FC236}">
-                <a16:creationId xmlns:a16="http://schemas.microsoft.com/office/drawing/2014/main" id="{D3A25516-B71E-07C9-B3F0-82E887E5F423}"/>
+                <a16:creationId xmlns:a16="http://schemas.microsoft.com/office/drawing/2014/main" id="{15EA2BE1-2901-78E3-ADCC-CEAE58F91BDA}"/>
               </a:ext>
             </a:extLst>
           </p:cNvPr>
@@ -2191,7 +2191,7 @@
           <p:cNvPr id="5" name="Date Placeholder 4">
             <a:extLst>
               <a:ext uri="{FF2B5EF4-FFF2-40B4-BE49-F238E27FC236}">
-                <a16:creationId xmlns:a16="http://schemas.microsoft.com/office/drawing/2014/main" id="{60FB6790-253A-6F82-EB55-B2789BA1A257}"/>
+                <a16:creationId xmlns:a16="http://schemas.microsoft.com/office/drawing/2014/main" id="{65E48F9F-ECE2-3F6F-3460-5F5478039B24}"/>
               </a:ext>
             </a:extLst>
           </p:cNvPr>
@@ -2207,9 +2207,9 @@
           <a:bodyPr/>
           <a:lstStyle/>
           <a:p>
-            <a:fld id="{D4B82164-15D3-4208-9C09-8289ADF02C1C}" type="datetimeFigureOut">
+            <a:fld id="{1E0E0194-E47C-45D2-BCFC-19F6E94C0411}" type="datetimeFigureOut">
               <a:rPr lang="en-US" smtClean="0"/>
-              <a:t>6/25/2026</a:t>
+              <a:t>6/26/2026</a:t>
             </a:fld>
             <a:endParaRPr lang="en-US"/>
           </a:p>
@@ -2220,7 +2220,7 @@
           <p:cNvPr id="6" name="Footer Placeholder 5">
             <a:extLst>
               <a:ext uri="{FF2B5EF4-FFF2-40B4-BE49-F238E27FC236}">
-                <a16:creationId xmlns:a16="http://schemas.microsoft.com/office/drawing/2014/main" id="{53FBBFDB-D45C-2668-06C6-AF0DD242DC8A}"/>
+                <a16:creationId xmlns:a16="http://schemas.microsoft.com/office/drawing/2014/main" id="{B85019F4-6741-43DB-AFD3-16C2334A232B}"/>
               </a:ext>
             </a:extLst>
           </p:cNvPr>
@@ -2245,7 +2245,7 @@
           <p:cNvPr id="7" name="Slide Number Placeholder 6">
             <a:extLst>
               <a:ext uri="{FF2B5EF4-FFF2-40B4-BE49-F238E27FC236}">
-                <a16:creationId xmlns:a16="http://schemas.microsoft.com/office/drawing/2014/main" id="{A7E46331-C58B-090C-F6BA-7B0291F37B2E}"/>
+                <a16:creationId xmlns:a16="http://schemas.microsoft.com/office/drawing/2014/main" id="{515CCD37-36D6-DDD6-074A-271A7539F381}"/>
               </a:ext>
             </a:extLst>
           </p:cNvPr>
@@ -2261,7 +2261,7 @@
           <a:bodyPr/>
           <a:lstStyle/>
           <a:p>
-            <a:fld id="{11943C22-FA77-4F5D-9362-24F8D4FE4676}" type="slidenum">
+            <a:fld id="{2C5FFCCB-F03B-45DB-8D0E-85A43D36A667}" type="slidenum">
               <a:rPr lang="en-US" smtClean="0"/>
               <a:t>‹#›</a:t>
             </a:fld>
@@ -2272,7 +2272,7 @@
     </p:spTree>
     <p:extLst>
       <p:ext uri="{BB962C8B-B14F-4D97-AF65-F5344CB8AC3E}">
-        <p14:creationId xmlns:p14="http://schemas.microsoft.com/office/powerpoint/2010/main" val="4168682510"/>
+        <p14:creationId xmlns:p14="http://schemas.microsoft.com/office/powerpoint/2010/main" val="3402887046"/>
       </p:ext>
     </p:extLst>
   </p:cSld>
@@ -2304,7 +2304,7 @@
           <p:cNvPr id="2" name="Title 1">
             <a:extLst>
               <a:ext uri="{FF2B5EF4-FFF2-40B4-BE49-F238E27FC236}">
-                <a16:creationId xmlns:a16="http://schemas.microsoft.com/office/drawing/2014/main" id="{01E264E9-1CCA-53CD-615D-6E3D2D652AA5}"/>
+                <a16:creationId xmlns:a16="http://schemas.microsoft.com/office/drawing/2014/main" id="{21981ECF-43D0-DD1E-E2F3-071AD44EB03B}"/>
               </a:ext>
             </a:extLst>
           </p:cNvPr>
@@ -2337,7 +2337,7 @@
           <p:cNvPr id="3" name="Text Placeholder 2">
             <a:extLst>
               <a:ext uri="{FF2B5EF4-FFF2-40B4-BE49-F238E27FC236}">
-                <a16:creationId xmlns:a16="http://schemas.microsoft.com/office/drawing/2014/main" id="{B0606A4E-8B74-AE50-AE78-8F0C29EB5B19}"/>
+                <a16:creationId xmlns:a16="http://schemas.microsoft.com/office/drawing/2014/main" id="{6BA079F8-3250-7EE2-C6BA-2C0D2A7373EC}"/>
               </a:ext>
             </a:extLst>
           </p:cNvPr>
@@ -2408,7 +2408,7 @@
           <p:cNvPr id="4" name="Content Placeholder 3">
             <a:extLst>
               <a:ext uri="{FF2B5EF4-FFF2-40B4-BE49-F238E27FC236}">
-                <a16:creationId xmlns:a16="http://schemas.microsoft.com/office/drawing/2014/main" id="{820F54D4-77A1-2C27-3512-217D3E499D6B}"/>
+                <a16:creationId xmlns:a16="http://schemas.microsoft.com/office/drawing/2014/main" id="{3D7C69CE-93F4-D65D-A128-4029576F602F}"/>
               </a:ext>
             </a:extLst>
           </p:cNvPr>
@@ -2470,7 +2470,7 @@
           <p:cNvPr id="5" name="Text Placeholder 4">
             <a:extLst>
               <a:ext uri="{FF2B5EF4-FFF2-40B4-BE49-F238E27FC236}">
-                <a16:creationId xmlns:a16="http://schemas.microsoft.com/office/drawing/2014/main" id="{0073EB2A-A977-967F-E44C-54C1EC6D7846}"/>
+                <a16:creationId xmlns:a16="http://schemas.microsoft.com/office/drawing/2014/main" id="{35C7859A-0514-4614-6DB2-44F17A46F752}"/>
               </a:ext>
             </a:extLst>
           </p:cNvPr>
@@ -2541,7 +2541,7 @@
           <p:cNvPr id="6" name="Content Placeholder 5">
             <a:extLst>
               <a:ext uri="{FF2B5EF4-FFF2-40B4-BE49-F238E27FC236}">
-                <a16:creationId xmlns:a16="http://schemas.microsoft.com/office/drawing/2014/main" id="{188B293F-A941-13D8-6FD6-450AC8BFC774}"/>
+                <a16:creationId xmlns:a16="http://schemas.microsoft.com/office/drawing/2014/main" id="{992CBA81-9A8C-566C-0ACE-9A2B2B57FA96}"/>
               </a:ext>
             </a:extLst>
           </p:cNvPr>
@@ -2603,7 +2603,7 @@
           <p:cNvPr id="7" name="Date Placeholder 6">
             <a:extLst>
               <a:ext uri="{FF2B5EF4-FFF2-40B4-BE49-F238E27FC236}">
-                <a16:creationId xmlns:a16="http://schemas.microsoft.com/office/drawing/2014/main" id="{58B8D8D8-B6B7-20D5-5842-43D2D59F962E}"/>
+                <a16:creationId xmlns:a16="http://schemas.microsoft.com/office/drawing/2014/main" id="{549E3A5B-C97F-C3EF-AC1F-7BC7C4EB3EB2}"/>
               </a:ext>
             </a:extLst>
           </p:cNvPr>
@@ -2619,9 +2619,9 @@
           <a:bodyPr/>
           <a:lstStyle/>
           <a:p>
-            <a:fld id="{D4B82164-15D3-4208-9C09-8289ADF02C1C}" type="datetimeFigureOut">
+            <a:fld id="{1E0E0194-E47C-45D2-BCFC-19F6E94C0411}" type="datetimeFigureOut">
               <a:rPr lang="en-US" smtClean="0"/>
-              <a:t>6/25/2026</a:t>
+              <a:t>6/26/2026</a:t>
             </a:fld>
             <a:endParaRPr lang="en-US"/>
           </a:p>
@@ -2632,7 +2632,7 @@
           <p:cNvPr id="8" name="Footer Placeholder 7">
             <a:extLst>
               <a:ext uri="{FF2B5EF4-FFF2-40B4-BE49-F238E27FC236}">
-                <a16:creationId xmlns:a16="http://schemas.microsoft.com/office/drawing/2014/main" id="{12F41658-C456-4840-6B41-A7DAC307B7FE}"/>
+                <a16:creationId xmlns:a16="http://schemas.microsoft.com/office/drawing/2014/main" id="{BC3F6066-9566-D51C-EEF6-84497211CF40}"/>
               </a:ext>
             </a:extLst>
           </p:cNvPr>
@@ -2657,7 +2657,7 @@
           <p:cNvPr id="9" name="Slide Number Placeholder 8">
             <a:extLst>
               <a:ext uri="{FF2B5EF4-FFF2-40B4-BE49-F238E27FC236}">
-                <a16:creationId xmlns:a16="http://schemas.microsoft.com/office/drawing/2014/main" id="{3D8CB1F2-F686-344E-FE33-D036D2C54DCD}"/>
+                <a16:creationId xmlns:a16="http://schemas.microsoft.com/office/drawing/2014/main" id="{DD655120-7CA8-4E63-7393-34A722F51CC3}"/>
               </a:ext>
             </a:extLst>
           </p:cNvPr>
@@ -2673,7 +2673,7 @@
           <a:bodyPr/>
           <a:lstStyle/>
           <a:p>
-            <a:fld id="{11943C22-FA77-4F5D-9362-24F8D4FE4676}" type="slidenum">
+            <a:fld id="{2C5FFCCB-F03B-45DB-8D0E-85A43D36A667}" type="slidenum">
               <a:rPr lang="en-US" smtClean="0"/>
               <a:t>‹#›</a:t>
             </a:fld>
@@ -2684,7 +2684,7 @@
     </p:spTree>
     <p:extLst>
       <p:ext uri="{BB962C8B-B14F-4D97-AF65-F5344CB8AC3E}">
-        <p14:creationId xmlns:p14="http://schemas.microsoft.com/office/powerpoint/2010/main" val="2438125893"/>
+        <p14:creationId xmlns:p14="http://schemas.microsoft.com/office/powerpoint/2010/main" val="4291730759"/>
       </p:ext>
     </p:extLst>
   </p:cSld>
@@ -2716,7 +2716,7 @@
           <p:cNvPr id="2" name="Title 1">
             <a:extLst>
               <a:ext uri="{FF2B5EF4-FFF2-40B4-BE49-F238E27FC236}">
-                <a16:creationId xmlns:a16="http://schemas.microsoft.com/office/drawing/2014/main" id="{A630046D-5060-3719-B508-B4BD56028AE2}"/>
+                <a16:creationId xmlns:a16="http://schemas.microsoft.com/office/drawing/2014/main" id="{98DBFBC7-0AD7-7E5A-E44A-66F6480B4BD3}"/>
               </a:ext>
             </a:extLst>
           </p:cNvPr>
@@ -2744,7 +2744,7 @@
           <p:cNvPr id="3" name="Date Placeholder 2">
             <a:extLst>
               <a:ext uri="{FF2B5EF4-FFF2-40B4-BE49-F238E27FC236}">
-                <a16:creationId xmlns:a16="http://schemas.microsoft.com/office/drawing/2014/main" id="{F3E3F53C-CF71-3B89-9CB5-92ED9F9C2888}"/>
+                <a16:creationId xmlns:a16="http://schemas.microsoft.com/office/drawing/2014/main" id="{EDB688A7-CA4A-437D-7D34-32FF7E769144}"/>
               </a:ext>
             </a:extLst>
           </p:cNvPr>
@@ -2760,9 +2760,9 @@
           <a:bodyPr/>
           <a:lstStyle/>
           <a:p>
-            <a:fld id="{D4B82164-15D3-4208-9C09-8289ADF02C1C}" type="datetimeFigureOut">
+            <a:fld id="{1E0E0194-E47C-45D2-BCFC-19F6E94C0411}" type="datetimeFigureOut">
               <a:rPr lang="en-US" smtClean="0"/>
-              <a:t>6/25/2026</a:t>
+              <a:t>6/26/2026</a:t>
             </a:fld>
             <a:endParaRPr lang="en-US"/>
           </a:p>
@@ -2773,7 +2773,7 @@
           <p:cNvPr id="4" name="Footer Placeholder 3">
             <a:extLst>
               <a:ext uri="{FF2B5EF4-FFF2-40B4-BE49-F238E27FC236}">
-                <a16:creationId xmlns:a16="http://schemas.microsoft.com/office/drawing/2014/main" id="{6C9E59DB-4BB2-4D30-3379-4D6BD20E1B1D}"/>
+                <a16:creationId xmlns:a16="http://schemas.microsoft.com/office/drawing/2014/main" id="{22D06B2C-0E20-CB78-E75F-751FFE1658DD}"/>
               </a:ext>
             </a:extLst>
           </p:cNvPr>
@@ -2798,7 +2798,7 @@
           <p:cNvPr id="5" name="Slide Number Placeholder 4">
             <a:extLst>
               <a:ext uri="{FF2B5EF4-FFF2-40B4-BE49-F238E27FC236}">
-                <a16:creationId xmlns:a16="http://schemas.microsoft.com/office/drawing/2014/main" id="{8B6EACE5-B14F-EA0E-8D90-6F3A438560BE}"/>
+                <a16:creationId xmlns:a16="http://schemas.microsoft.com/office/drawing/2014/main" id="{525224EC-CE4E-0444-DDB5-8A60F24670B6}"/>
               </a:ext>
             </a:extLst>
           </p:cNvPr>
@@ -2814,7 +2814,7 @@
           <a:bodyPr/>
           <a:lstStyle/>
           <a:p>
-            <a:fld id="{11943C22-FA77-4F5D-9362-24F8D4FE4676}" type="slidenum">
+            <a:fld id="{2C5FFCCB-F03B-45DB-8D0E-85A43D36A667}" type="slidenum">
               <a:rPr lang="en-US" smtClean="0"/>
               <a:t>‹#›</a:t>
             </a:fld>
@@ -2825,7 +2825,7 @@
     </p:spTree>
     <p:extLst>
       <p:ext uri="{BB962C8B-B14F-4D97-AF65-F5344CB8AC3E}">
-        <p14:creationId xmlns:p14="http://schemas.microsoft.com/office/powerpoint/2010/main" val="2948172026"/>
+        <p14:creationId xmlns:p14="http://schemas.microsoft.com/office/powerpoint/2010/main" val="2833203714"/>
       </p:ext>
     </p:extLst>
   </p:cSld>
@@ -2857,7 +2857,7 @@
           <p:cNvPr id="2" name="Date Placeholder 1">
             <a:extLst>
               <a:ext uri="{FF2B5EF4-FFF2-40B4-BE49-F238E27FC236}">
-                <a16:creationId xmlns:a16="http://schemas.microsoft.com/office/drawing/2014/main" id="{5BEC3DD5-C25B-A496-03C9-4F430DD14328}"/>
+                <a16:creationId xmlns:a16="http://schemas.microsoft.com/office/drawing/2014/main" id="{3E9E601C-0B58-D57E-0DE8-3405FC6FF774}"/>
               </a:ext>
             </a:extLst>
           </p:cNvPr>
@@ -2873,9 +2873,9 @@
           <a:bodyPr/>
           <a:lstStyle/>
           <a:p>
-            <a:fld id="{D4B82164-15D3-4208-9C09-8289ADF02C1C}" type="datetimeFigureOut">
+            <a:fld id="{1E0E0194-E47C-45D2-BCFC-19F6E94C0411}" type="datetimeFigureOut">
               <a:rPr lang="en-US" smtClean="0"/>
-              <a:t>6/25/2026</a:t>
+              <a:t>6/26/2026</a:t>
             </a:fld>
             <a:endParaRPr lang="en-US"/>
           </a:p>
@@ -2886,7 +2886,7 @@
           <p:cNvPr id="3" name="Footer Placeholder 2">
             <a:extLst>
               <a:ext uri="{FF2B5EF4-FFF2-40B4-BE49-F238E27FC236}">
-                <a16:creationId xmlns:a16="http://schemas.microsoft.com/office/drawing/2014/main" id="{5CE0E7AD-2037-8AA4-282C-ED195A494630}"/>
+                <a16:creationId xmlns:a16="http://schemas.microsoft.com/office/drawing/2014/main" id="{FCF8A94C-9D82-BDB2-7FBF-36FFFCAC6E15}"/>
               </a:ext>
             </a:extLst>
           </p:cNvPr>
@@ -2911,7 +2911,7 @@
           <p:cNvPr id="4" name="Slide Number Placeholder 3">
             <a:extLst>
               <a:ext uri="{FF2B5EF4-FFF2-40B4-BE49-F238E27FC236}">
-                <a16:creationId xmlns:a16="http://schemas.microsoft.com/office/drawing/2014/main" id="{636AE367-F9D7-FE2A-0DE5-7BB491387116}"/>
+                <a16:creationId xmlns:a16="http://schemas.microsoft.com/office/drawing/2014/main" id="{735CAC2A-0FAA-4B78-46E2-EF7AEFB52EBB}"/>
               </a:ext>
             </a:extLst>
           </p:cNvPr>
@@ -2927,7 +2927,7 @@
           <a:bodyPr/>
           <a:lstStyle/>
           <a:p>
-            <a:fld id="{11943C22-FA77-4F5D-9362-24F8D4FE4676}" type="slidenum">
+            <a:fld id="{2C5FFCCB-F03B-45DB-8D0E-85A43D36A667}" type="slidenum">
               <a:rPr lang="en-US" smtClean="0"/>
               <a:t>‹#›</a:t>
             </a:fld>
@@ -2938,7 +2938,7 @@
     </p:spTree>
     <p:extLst>
       <p:ext uri="{BB962C8B-B14F-4D97-AF65-F5344CB8AC3E}">
-        <p14:creationId xmlns:p14="http://schemas.microsoft.com/office/powerpoint/2010/main" val="533209056"/>
+        <p14:creationId xmlns:p14="http://schemas.microsoft.com/office/powerpoint/2010/main" val="2029805987"/>
       </p:ext>
     </p:extLst>
   </p:cSld>
@@ -2970,7 +2970,7 @@
           <p:cNvPr id="2" name="Title 1">
             <a:extLst>
               <a:ext uri="{FF2B5EF4-FFF2-40B4-BE49-F238E27FC236}">
-                <a16:creationId xmlns:a16="http://schemas.microsoft.com/office/drawing/2014/main" id="{367563F8-318A-A305-AE91-761AF1289D6A}"/>
+                <a16:creationId xmlns:a16="http://schemas.microsoft.com/office/drawing/2014/main" id="{94DFE734-0263-F14E-4199-77C202D15944}"/>
               </a:ext>
             </a:extLst>
           </p:cNvPr>
@@ -3007,7 +3007,7 @@
           <p:cNvPr id="3" name="Content Placeholder 2">
             <a:extLst>
               <a:ext uri="{FF2B5EF4-FFF2-40B4-BE49-F238E27FC236}">
-                <a16:creationId xmlns:a16="http://schemas.microsoft.com/office/drawing/2014/main" id="{05B864DD-0972-05E4-7B96-68ECF24DD11F}"/>
+                <a16:creationId xmlns:a16="http://schemas.microsoft.com/office/drawing/2014/main" id="{70482053-A2D0-7D41-0F26-5D2AB1AB0D29}"/>
               </a:ext>
             </a:extLst>
           </p:cNvPr>
@@ -3097,7 +3097,7 @@
           <p:cNvPr id="4" name="Text Placeholder 3">
             <a:extLst>
               <a:ext uri="{FF2B5EF4-FFF2-40B4-BE49-F238E27FC236}">
-                <a16:creationId xmlns:a16="http://schemas.microsoft.com/office/drawing/2014/main" id="{487E0272-0FB2-C039-E3CB-58501D1B56D9}"/>
+                <a16:creationId xmlns:a16="http://schemas.microsoft.com/office/drawing/2014/main" id="{27023EF0-DA4B-C0BF-44D5-A6970C699C54}"/>
               </a:ext>
             </a:extLst>
           </p:cNvPr>
@@ -3168,7 +3168,7 @@
           <p:cNvPr id="5" name="Date Placeholder 4">
             <a:extLst>
               <a:ext uri="{FF2B5EF4-FFF2-40B4-BE49-F238E27FC236}">
-                <a16:creationId xmlns:a16="http://schemas.microsoft.com/office/drawing/2014/main" id="{9772A0F5-7931-339A-A30D-49E32E348767}"/>
+                <a16:creationId xmlns:a16="http://schemas.microsoft.com/office/drawing/2014/main" id="{F9D19802-BFA7-0F67-37AB-62AA3514BD01}"/>
               </a:ext>
             </a:extLst>
           </p:cNvPr>
@@ -3184,9 +3184,9 @@
           <a:bodyPr/>
           <a:lstStyle/>
           <a:p>
-            <a:fld id="{D4B82164-15D3-4208-9C09-8289ADF02C1C}" type="datetimeFigureOut">
+            <a:fld id="{1E0E0194-E47C-45D2-BCFC-19F6E94C0411}" type="datetimeFigureOut">
               <a:rPr lang="en-US" smtClean="0"/>
-              <a:t>6/25/2026</a:t>
+              <a:t>6/26/2026</a:t>
             </a:fld>
             <a:endParaRPr lang="en-US"/>
           </a:p>
@@ -3197,7 +3197,7 @@
           <p:cNvPr id="6" name="Footer Placeholder 5">
             <a:extLst>
               <a:ext uri="{FF2B5EF4-FFF2-40B4-BE49-F238E27FC236}">
-                <a16:creationId xmlns:a16="http://schemas.microsoft.com/office/drawing/2014/main" id="{434BB886-7E48-3357-11F9-2B004DE90676}"/>
+                <a16:creationId xmlns:a16="http://schemas.microsoft.com/office/drawing/2014/main" id="{05373977-3667-56C9-AB74-C1676B3797CE}"/>
               </a:ext>
             </a:extLst>
           </p:cNvPr>
@@ -3222,7 +3222,7 @@
           <p:cNvPr id="7" name="Slide Number Placeholder 6">
             <a:extLst>
               <a:ext uri="{FF2B5EF4-FFF2-40B4-BE49-F238E27FC236}">
-                <a16:creationId xmlns:a16="http://schemas.microsoft.com/office/drawing/2014/main" id="{2C122F11-05EB-7BA3-E62E-94C15FC92B9C}"/>
+                <a16:creationId xmlns:a16="http://schemas.microsoft.com/office/drawing/2014/main" id="{26EF2F7F-924B-095E-210D-D1278E175D17}"/>
               </a:ext>
             </a:extLst>
           </p:cNvPr>
@@ -3238,7 +3238,7 @@
           <a:bodyPr/>
           <a:lstStyle/>
           <a:p>
-            <a:fld id="{11943C22-FA77-4F5D-9362-24F8D4FE4676}" type="slidenum">
+            <a:fld id="{2C5FFCCB-F03B-45DB-8D0E-85A43D36A667}" type="slidenum">
               <a:rPr lang="en-US" smtClean="0"/>
               <a:t>‹#›</a:t>
             </a:fld>
@@ -3249,7 +3249,7 @@
     </p:spTree>
     <p:extLst>
       <p:ext uri="{BB962C8B-B14F-4D97-AF65-F5344CB8AC3E}">
-        <p14:creationId xmlns:p14="http://schemas.microsoft.com/office/powerpoint/2010/main" val="1683090531"/>
+        <p14:creationId xmlns:p14="http://schemas.microsoft.com/office/powerpoint/2010/main" val="3855095712"/>
       </p:ext>
     </p:extLst>
   </p:cSld>
@@ -3281,7 +3281,7 @@
           <p:cNvPr id="2" name="Title 1">
             <a:extLst>
               <a:ext uri="{FF2B5EF4-FFF2-40B4-BE49-F238E27FC236}">
-                <a16:creationId xmlns:a16="http://schemas.microsoft.com/office/drawing/2014/main" id="{3E2D64F9-E0D0-73F2-6238-390BFF6D1915}"/>
+                <a16:creationId xmlns:a16="http://schemas.microsoft.com/office/drawing/2014/main" id="{EA4DBB09-45E3-DEA3-4AEB-4020831BBB8E}"/>
               </a:ext>
             </a:extLst>
           </p:cNvPr>
@@ -3318,7 +3318,7 @@
           <p:cNvPr id="3" name="Picture Placeholder 2">
             <a:extLst>
               <a:ext uri="{FF2B5EF4-FFF2-40B4-BE49-F238E27FC236}">
-                <a16:creationId xmlns:a16="http://schemas.microsoft.com/office/drawing/2014/main" id="{694CFEFD-DD8E-DE82-E94E-D4A88ED5C632}"/>
+                <a16:creationId xmlns:a16="http://schemas.microsoft.com/office/drawing/2014/main" id="{D76CF80E-6494-7302-8721-371C01304E94}"/>
               </a:ext>
             </a:extLst>
           </p:cNvPr>
@@ -3385,7 +3385,7 @@
           <p:cNvPr id="4" name="Text Placeholder 3">
             <a:extLst>
               <a:ext uri="{FF2B5EF4-FFF2-40B4-BE49-F238E27FC236}">
-                <a16:creationId xmlns:a16="http://schemas.microsoft.com/office/drawing/2014/main" id="{AA07F88E-D9C8-7062-E642-792A8AA11F03}"/>
+                <a16:creationId xmlns:a16="http://schemas.microsoft.com/office/drawing/2014/main" id="{B78355A3-B90F-2B35-2536-69D016FFDD97}"/>
               </a:ext>
             </a:extLst>
           </p:cNvPr>
@@ -3456,7 +3456,7 @@
           <p:cNvPr id="5" name="Date Placeholder 4">
             <a:extLst>
               <a:ext uri="{FF2B5EF4-FFF2-40B4-BE49-F238E27FC236}">
-                <a16:creationId xmlns:a16="http://schemas.microsoft.com/office/drawing/2014/main" id="{B6EDED4C-A786-9503-C68C-B335A70845FB}"/>
+                <a16:creationId xmlns:a16="http://schemas.microsoft.com/office/drawing/2014/main" id="{4F2A19BC-D5AE-277A-76C3-EDC76D068E98}"/>
               </a:ext>
             </a:extLst>
           </p:cNvPr>
@@ -3472,9 +3472,9 @@
           <a:bodyPr/>
           <a:lstStyle/>
           <a:p>
-            <a:fld id="{D4B82164-15D3-4208-9C09-8289ADF02C1C}" type="datetimeFigureOut">
+            <a:fld id="{1E0E0194-E47C-45D2-BCFC-19F6E94C0411}" type="datetimeFigureOut">
               <a:rPr lang="en-US" smtClean="0"/>
-              <a:t>6/25/2026</a:t>
+              <a:t>6/26/2026</a:t>
             </a:fld>
             <a:endParaRPr lang="en-US"/>
           </a:p>
@@ -3485,7 +3485,7 @@
           <p:cNvPr id="6" name="Footer Placeholder 5">
             <a:extLst>
               <a:ext uri="{FF2B5EF4-FFF2-40B4-BE49-F238E27FC236}">
-                <a16:creationId xmlns:a16="http://schemas.microsoft.com/office/drawing/2014/main" id="{102D2DD9-E7AF-8A76-B954-B35045110DB4}"/>
+                <a16:creationId xmlns:a16="http://schemas.microsoft.com/office/drawing/2014/main" id="{79F1D6B9-CE85-0852-6240-F3787B5D8323}"/>
               </a:ext>
             </a:extLst>
           </p:cNvPr>
@@ -3510,7 +3510,7 @@
           <p:cNvPr id="7" name="Slide Number Placeholder 6">
             <a:extLst>
               <a:ext uri="{FF2B5EF4-FFF2-40B4-BE49-F238E27FC236}">
-                <a16:creationId xmlns:a16="http://schemas.microsoft.com/office/drawing/2014/main" id="{2FABE00A-3C5B-5598-BA44-367C84FC753B}"/>
+                <a16:creationId xmlns:a16="http://schemas.microsoft.com/office/drawing/2014/main" id="{64CDCB4C-C397-AA68-1BE8-0A6FC886C56C}"/>
               </a:ext>
             </a:extLst>
           </p:cNvPr>
@@ -3526,7 +3526,7 @@
           <a:bodyPr/>
           <a:lstStyle/>
           <a:p>
-            <a:fld id="{11943C22-FA77-4F5D-9362-24F8D4FE4676}" type="slidenum">
+            <a:fld id="{2C5FFCCB-F03B-45DB-8D0E-85A43D36A667}" type="slidenum">
               <a:rPr lang="en-US" smtClean="0"/>
               <a:t>‹#›</a:t>
             </a:fld>
@@ -3537,7 +3537,7 @@
     </p:spTree>
     <p:extLst>
       <p:ext uri="{BB962C8B-B14F-4D97-AF65-F5344CB8AC3E}">
-        <p14:creationId xmlns:p14="http://schemas.microsoft.com/office/powerpoint/2010/main" val="1017701067"/>
+        <p14:creationId xmlns:p14="http://schemas.microsoft.com/office/powerpoint/2010/main" val="3894283979"/>
       </p:ext>
     </p:extLst>
   </p:cSld>
@@ -3574,7 +3574,7 @@
           <p:cNvPr id="2" name="Title Placeholder 1">
             <a:extLst>
               <a:ext uri="{FF2B5EF4-FFF2-40B4-BE49-F238E27FC236}">
-                <a16:creationId xmlns:a16="http://schemas.microsoft.com/office/drawing/2014/main" id="{CF749FFB-0A95-80DC-4AAA-A4AD57D01CE1}"/>
+                <a16:creationId xmlns:a16="http://schemas.microsoft.com/office/drawing/2014/main" id="{0124A2AD-7A22-578C-790E-7A766A569762}"/>
               </a:ext>
             </a:extLst>
           </p:cNvPr>
@@ -3612,7 +3612,7 @@
           <p:cNvPr id="3" name="Text Placeholder 2">
             <a:extLst>
               <a:ext uri="{FF2B5EF4-FFF2-40B4-BE49-F238E27FC236}">
-                <a16:creationId xmlns:a16="http://schemas.microsoft.com/office/drawing/2014/main" id="{2FA1CB4B-412F-21BD-73AA-B3BFE3F5441E}"/>
+                <a16:creationId xmlns:a16="http://schemas.microsoft.com/office/drawing/2014/main" id="{38D576C7-7248-B0BD-0913-54E10962E30F}"/>
               </a:ext>
             </a:extLst>
           </p:cNvPr>
@@ -3679,7 +3679,7 @@
           <p:cNvPr id="4" name="Date Placeholder 3">
             <a:extLst>
               <a:ext uri="{FF2B5EF4-FFF2-40B4-BE49-F238E27FC236}">
-                <a16:creationId xmlns:a16="http://schemas.microsoft.com/office/drawing/2014/main" id="{D13F7694-DD51-376C-D4F9-528A68E113C5}"/>
+                <a16:creationId xmlns:a16="http://schemas.microsoft.com/office/drawing/2014/main" id="{061593F6-F640-A93B-BAB6-380E91C61D37}"/>
               </a:ext>
             </a:extLst>
           </p:cNvPr>
@@ -3713,9 +3713,9 @@
             </a:lvl1pPr>
           </a:lstStyle>
           <a:p>
-            <a:fld id="{D4B82164-15D3-4208-9C09-8289ADF02C1C}" type="datetimeFigureOut">
+            <a:fld id="{1E0E0194-E47C-45D2-BCFC-19F6E94C0411}" type="datetimeFigureOut">
               <a:rPr lang="en-US" smtClean="0"/>
-              <a:t>6/25/2026</a:t>
+              <a:t>6/26/2026</a:t>
             </a:fld>
             <a:endParaRPr lang="en-US"/>
           </a:p>
@@ -3726,7 +3726,7 @@
           <p:cNvPr id="5" name="Footer Placeholder 4">
             <a:extLst>
               <a:ext uri="{FF2B5EF4-FFF2-40B4-BE49-F238E27FC236}">
-                <a16:creationId xmlns:a16="http://schemas.microsoft.com/office/drawing/2014/main" id="{86B44846-BF9E-2985-32ED-1A43E6225A86}"/>
+                <a16:creationId xmlns:a16="http://schemas.microsoft.com/office/drawing/2014/main" id="{EE5361AC-1769-1487-B2C3-E57504F45B33}"/>
               </a:ext>
             </a:extLst>
           </p:cNvPr>
@@ -3769,7 +3769,7 @@
           <p:cNvPr id="6" name="Slide Number Placeholder 5">
             <a:extLst>
               <a:ext uri="{FF2B5EF4-FFF2-40B4-BE49-F238E27FC236}">
-                <a16:creationId xmlns:a16="http://schemas.microsoft.com/office/drawing/2014/main" id="{CA7BE7CE-5503-BC6F-AFE0-64B5280F8674}"/>
+                <a16:creationId xmlns:a16="http://schemas.microsoft.com/office/drawing/2014/main" id="{8B00BBE2-9DCB-0233-1E20-252FEDDD0FDD}"/>
               </a:ext>
             </a:extLst>
           </p:cNvPr>
@@ -3803,7 +3803,7 @@
             </a:lvl1pPr>
           </a:lstStyle>
           <a:p>
-            <a:fld id="{11943C22-FA77-4F5D-9362-24F8D4FE4676}" type="slidenum">
+            <a:fld id="{2C5FFCCB-F03B-45DB-8D0E-85A43D36A667}" type="slidenum">
               <a:rPr lang="en-US" smtClean="0"/>
               <a:t>‹#›</a:t>
             </a:fld>
@@ -3814,7 +3814,7 @@
     </p:spTree>
     <p:extLst>
       <p:ext uri="{BB962C8B-B14F-4D97-AF65-F5344CB8AC3E}">
-        <p14:creationId xmlns:p14="http://schemas.microsoft.com/office/powerpoint/2010/main" val="1651798288"/>
+        <p14:creationId xmlns:p14="http://schemas.microsoft.com/office/powerpoint/2010/main" val="339757373"/>
       </p:ext>
     </p:extLst>
   </p:cSld>
@@ -4137,7 +4137,7 @@
           <p:cNvPr id="2" name="TextBox 1">
             <a:extLst>
               <a:ext uri="{FF2B5EF4-FFF2-40B4-BE49-F238E27FC236}">
-                <a16:creationId xmlns:a16="http://schemas.microsoft.com/office/drawing/2014/main" id="{46EFC676-1C69-CD8F-BA14-DE650AA46DEB}"/>
+                <a16:creationId xmlns:a16="http://schemas.microsoft.com/office/drawing/2014/main" id="{59AFC25A-F28C-56C9-8BEF-0037A9DAAD1E}"/>
               </a:ext>
             </a:extLst>
           </p:cNvPr>
@@ -4172,7 +4172,7 @@
           <p:cNvPr id="3" name="Chart 2">
             <a:extLst>
               <a:ext uri="{FF2B5EF4-FFF2-40B4-BE49-F238E27FC236}">
-                <a16:creationId xmlns:a16="http://schemas.microsoft.com/office/drawing/2014/main" id="{38813378-FD04-C167-0B39-4F9FD77B0246}"/>
+                <a16:creationId xmlns:a16="http://schemas.microsoft.com/office/drawing/2014/main" id="{7F9C0A52-5E04-AAC4-ED7A-724EE10915A2}"/>
               </a:ext>
             </a:extLst>
           </p:cNvPr>
@@ -4180,7 +4180,7 @@
           <p:nvPr>
             <p:extLst>
               <p:ext uri="{D42A27DB-BD31-4B8C-83A1-F6EECF244321}">
-                <p14:modId xmlns:p14="http://schemas.microsoft.com/office/powerpoint/2010/main" val="2637625652"/>
+                <p14:modId xmlns:p14="http://schemas.microsoft.com/office/powerpoint/2010/main" val="1826628516"/>
               </p:ext>
             </p:extLst>
           </p:nvPr>
@@ -4198,7 +4198,7 @@
     </p:spTree>
     <p:extLst>
       <p:ext uri="{BB962C8B-B14F-4D97-AF65-F5344CB8AC3E}">
-        <p14:creationId xmlns:p14="http://schemas.microsoft.com/office/powerpoint/2010/main" val="839538531"/>
+        <p14:creationId xmlns:p14="http://schemas.microsoft.com/office/powerpoint/2010/main" val="574463497"/>
       </p:ext>
     </p:extLst>
   </p:cSld>
@@ -4230,7 +4230,7 @@
           <p:cNvPr id="2" name="TextBox 1">
             <a:extLst>
               <a:ext uri="{FF2B5EF4-FFF2-40B4-BE49-F238E27FC236}">
-                <a16:creationId xmlns:a16="http://schemas.microsoft.com/office/drawing/2014/main" id="{FBE4D387-B0FA-FD91-5C14-418E847E8998}"/>
+                <a16:creationId xmlns:a16="http://schemas.microsoft.com/office/drawing/2014/main" id="{5F32DA05-7A48-0770-9FE9-211613E96919}"/>
               </a:ext>
             </a:extLst>
           </p:cNvPr>
@@ -4265,7 +4265,7 @@
           <p:cNvPr id="3" name="Chart 2">
             <a:extLst>
               <a:ext uri="{FF2B5EF4-FFF2-40B4-BE49-F238E27FC236}">
-                <a16:creationId xmlns:a16="http://schemas.microsoft.com/office/drawing/2014/main" id="{199D5F20-8DB0-B08A-AA24-B958C35AC490}"/>
+                <a16:creationId xmlns:a16="http://schemas.microsoft.com/office/drawing/2014/main" id="{BFD0380C-259C-47A8-1C23-7D5E9EC26286}"/>
               </a:ext>
             </a:extLst>
           </p:cNvPr>
@@ -4273,7 +4273,7 @@
           <p:nvPr>
             <p:extLst>
               <p:ext uri="{D42A27DB-BD31-4B8C-83A1-F6EECF244321}">
-                <p14:modId xmlns:p14="http://schemas.microsoft.com/office/powerpoint/2010/main" val="3116609428"/>
+                <p14:modId xmlns:p14="http://schemas.microsoft.com/office/powerpoint/2010/main" val="2789700532"/>
               </p:ext>
             </p:extLst>
           </p:nvPr>
@@ -4291,7 +4291,7 @@
     </p:spTree>
     <p:extLst>
       <p:ext uri="{BB962C8B-B14F-4D97-AF65-F5344CB8AC3E}">
-        <p14:creationId xmlns:p14="http://schemas.microsoft.com/office/powerpoint/2010/main" val="4071732284"/>
+        <p14:creationId xmlns:p14="http://schemas.microsoft.com/office/powerpoint/2010/main" val="1513193721"/>
       </p:ext>
     </p:extLst>
   </p:cSld>
@@ -4323,7 +4323,7 @@
           <p:cNvPr id="2" name="TextBox 1">
             <a:extLst>
               <a:ext uri="{FF2B5EF4-FFF2-40B4-BE49-F238E27FC236}">
-                <a16:creationId xmlns:a16="http://schemas.microsoft.com/office/drawing/2014/main" id="{5CB0624C-30DC-366D-BF9F-59FC5BF1BEB9}"/>
+                <a16:creationId xmlns:a16="http://schemas.microsoft.com/office/drawing/2014/main" id="{9DDF4372-BFD5-3B11-8A78-F84CD518F800}"/>
               </a:ext>
             </a:extLst>
           </p:cNvPr>
@@ -4358,7 +4358,7 @@
           <p:cNvPr id="3" name="Chart 2">
             <a:extLst>
               <a:ext uri="{FF2B5EF4-FFF2-40B4-BE49-F238E27FC236}">
-                <a16:creationId xmlns:a16="http://schemas.microsoft.com/office/drawing/2014/main" id="{DF2F2774-1FC3-58AF-2AD3-B145664AEB31}"/>
+                <a16:creationId xmlns:a16="http://schemas.microsoft.com/office/drawing/2014/main" id="{BFA9227D-C079-7218-9EBE-B108C74872A9}"/>
               </a:ext>
             </a:extLst>
           </p:cNvPr>
@@ -4366,7 +4366,7 @@
           <p:nvPr>
             <p:extLst>
               <p:ext uri="{D42A27DB-BD31-4B8C-83A1-F6EECF244321}">
-                <p14:modId xmlns:p14="http://schemas.microsoft.com/office/powerpoint/2010/main" val="1552646643"/>
+                <p14:modId xmlns:p14="http://schemas.microsoft.com/office/powerpoint/2010/main" val="2768957145"/>
               </p:ext>
             </p:extLst>
           </p:nvPr>
@@ -4384,7 +4384,7 @@
     </p:spTree>
     <p:extLst>
       <p:ext uri="{BB962C8B-B14F-4D97-AF65-F5344CB8AC3E}">
-        <p14:creationId xmlns:p14="http://schemas.microsoft.com/office/powerpoint/2010/main" val="1356551755"/>
+        <p14:creationId xmlns:p14="http://schemas.microsoft.com/office/powerpoint/2010/main" val="1914428052"/>
       </p:ext>
     </p:extLst>
   </p:cSld>
@@ -4416,7 +4416,7 @@
           <p:cNvPr id="2" name="TextBox 1">
             <a:extLst>
               <a:ext uri="{FF2B5EF4-FFF2-40B4-BE49-F238E27FC236}">
-                <a16:creationId xmlns:a16="http://schemas.microsoft.com/office/drawing/2014/main" id="{9F021049-F9A8-F284-3A2F-50DF656F11AC}"/>
+                <a16:creationId xmlns:a16="http://schemas.microsoft.com/office/drawing/2014/main" id="{D50F8B17-FC52-E563-0047-2DBAC7660D3D}"/>
               </a:ext>
             </a:extLst>
           </p:cNvPr>
@@ -4451,7 +4451,7 @@
           <p:cNvPr id="3" name="Chart 2">
             <a:extLst>
               <a:ext uri="{FF2B5EF4-FFF2-40B4-BE49-F238E27FC236}">
-                <a16:creationId xmlns:a16="http://schemas.microsoft.com/office/drawing/2014/main" id="{DB068DE4-E06F-2587-50F0-0E5D614C0182}"/>
+                <a16:creationId xmlns:a16="http://schemas.microsoft.com/office/drawing/2014/main" id="{A345FA83-AC0F-679E-E4ED-2D2AD5CF8D72}"/>
               </a:ext>
             </a:extLst>
           </p:cNvPr>
@@ -4459,7 +4459,7 @@
           <p:nvPr>
             <p:extLst>
               <p:ext uri="{D42A27DB-BD31-4B8C-83A1-F6EECF244321}">
-                <p14:modId xmlns:p14="http://schemas.microsoft.com/office/powerpoint/2010/main" val="211522855"/>
+                <p14:modId xmlns:p14="http://schemas.microsoft.com/office/powerpoint/2010/main" val="2684818101"/>
               </p:ext>
             </p:extLst>
           </p:nvPr>
@@ -4477,7 +4477,7 @@
     </p:spTree>
     <p:extLst>
       <p:ext uri="{BB962C8B-B14F-4D97-AF65-F5344CB8AC3E}">
-        <p14:creationId xmlns:p14="http://schemas.microsoft.com/office/powerpoint/2010/main" val="2334672759"/>
+        <p14:creationId xmlns:p14="http://schemas.microsoft.com/office/powerpoint/2010/main" val="4186888337"/>
       </p:ext>
     </p:extLst>
   </p:cSld>
